--- a/docs/Презентация МедЦена (по шаблону).pptx
+++ b/docs/Презентация МедЦена (по шаблону).pptx
@@ -8903,7 +8903,7 @@
           <a:lstStyle/>
           <a:p>
             <a:r>
-              <a:t>Команда TechnoKod</a:t>
+              <a:t>Команда №43</a:t>
             </a:r>
           </a:p>
         </p:txBody>
